--- a/docs/DaoTao/Buoi08_SuaProcedure.pptx
+++ b/docs/DaoTao/Buoi08_SuaProcedure.pptx
@@ -609,7 +609,7 @@
           </a:p>
           <a:p>
             <a:r>
-              <a:t>- Tránh lỗi NULL, chia 0, collation, ngày, transaction, quyền</a:t>
+              <a:t>- Tránh các lỗi về NULL, chia cho 0, collation, ngày, transaction, quyền</a:t>
             </a:r>
           </a:p>
           <a:p>
@@ -709,7 +709,7 @@
           <a:lstStyle/>
           <a:p>
             <a:r>
-              <a:t>Tám bước. 1: tìm đúng procedure — từ menu xem command Processing của Filter, hoặc bật Profiler, hoặc Lookup theo nội dung. 2: Ai đang dùng — xem procedure khác và controller nào gọi. 3: mở dạng ALTER, lưu nguyên văn bản cũ ra file, đó chính là script rollback; Bcode cũng tự lưu BASELINE trong Lịch sử sửa procedure. 4: sửa trên database thử bằng ALTER. 5: test với tham số thật copy từ Profiler; procedure có ghi dữ liệu thì bọc BEGIN TRAN ... ROLLBACK; dùng Debug từng bước nếu cần. 6: So sánh object giữa bản dev và bản khách. 7: đưa vào SQL Object của yêu cầu, kèm script rollback. 8: triển khai, kiểm tra màn hình, theo dõi.</a:t>
+              <a:t>Tám bước. Bước 1: tìm đúng procedure — từ menu xem command Processing của Filter, hoặc bật Profiler, hoặc dùng Lookup tìm theo nội dung code. Bước 2: dùng Ai đang dùng (Ctrl+Alt+U) để xem những procedure khác và controller nào đang gọi procedure này. Bước 3: mở dạng ALTER, lưu nguyên văn bản cũ ra file — đó chính là script rollback; Bcode cũng tự lưu bản gốc (BASELINE) trong Lịch sử sửa procedure. Bước 4: sửa trên database thử bằng ALTER. Bước 5: test với tham số thật copy từ Profiler; procedure có ghi dữ liệu thì bọc trong BEGIN TRAN ... ROLLBACK; dùng Debug từng bước nếu cần. Bước 6: dùng So sánh object để so bản dev với bản đang chạy ở khách. Bước 7: đưa procedure vào mục SQL Object của yêu cầu, kèm script rollback. Bước 8: triển khai, kiểm tra màn hình trên web và theo dõi thêm một thời gian.</a:t>
             </a:r>
           </a:p>
         </p:txBody>
@@ -779,32 +779,32 @@
           <a:lstStyle/>
           <a:p>
             <a:r>
-              <a:t>Trong command của controller, Fast thay các macro @@ trước khi gửi xuống SQL. Số lần đếm trên source FBO mẫu để thấy cái nào hay gặp nhất.</a:t>
-            </a:r>
-          </a:p>
-          <a:p>
-            <a:r>
-              <a:t>@@table là bảng của controller; @@userID, @@admin; @@language là 'v' hoặc 'e'; @@sysDatabaseName để gọi bảng Sys từ App.</a:t>
-            </a:r>
-          </a:p>
-          <a:p>
-            <a:r>
-              <a:t>@ma_bp là giá trị mới của field trên form, $ma_bp.OldValue là giá trị cũ — dùng khi người dùng đổi mã khoá: kiểm tra bản ghi cũ còn tồn tại, cập nhật bảng chi tiết theo mã cũ.</a:t>
-            </a:r>
-          </a:p>
-          <a:p>
-            <a:r>
-              <a:t>Quan trọng: copy command sang SSMS / SQL Query thì macro không chạy — phải thay bằng giá trị. Ctrl+Enter trong BcodeViewer sẽ hỏi giá trị macro.</a:t>
-            </a:r>
-          </a:p>
-          <a:p>
-            <a:r>
-              <a:t>Trong procedure, các giá trị này truyền vào bằng tham số @Language, @UserID, @Admin, @Unit.</a:t>
-            </a:r>
-          </a:p>
-          <a:p>
-            <a:r>
-              <a:t>Lưu ý: procedure có chỗ so @Language = 'V' hoa, controller so 'v' thường — collation không phân biệt hoa thường thì như nhau, nhưng đừng giả định.</a:t>
+              <a:t>Trong command của controller, Fast thay các macro @@ bằng giá trị thật trước khi gửi câu lệnh xuống SQL. Cột "≈ lần" là số lần xuất hiện, đếm trên source FBO mẫu, để thấy macro nào hay gặp nhất.</a:t>
+            </a:r>
+          </a:p>
+          <a:p>
+            <a:r>
+              <a:t>@@table là bảng của controller; @@userID là user đang đăng nhập, @@admin cho biết user có quyền admin không; @@language là 'v' hoặc 'e'; @@sysDatabaseName dùng để gọi bảng của Sys Data khi đang ở App Data.</a:t>
+            </a:r>
+          </a:p>
+          <a:p>
+            <a:r>
+              <a:t>@ma_bp là giá trị mới của field trên form, $ma_bp.OldValue là giá trị cũ — dùng khi người dùng đổi mã khoá: kiểm tra bản ghi cũ còn tồn tại không, cập nhật bảng chi tiết theo mã cũ.</a:t>
+            </a:r>
+          </a:p>
+          <a:p>
+            <a:r>
+              <a:t>Quan trọng: copy command sang SSMS hoặc SQL Query thì macro không chạy được — phải tự thay bằng giá trị. Ctrl+Enter trong BcodeViewer sẽ hỏi giá trị cho từng macro.</a:t>
+            </a:r>
+          </a:p>
+          <a:p>
+            <a:r>
+              <a:t>Trong procedure, các giá trị này được truyền vào qua tham số @Language, @UserID, @Admin, @Unit.</a:t>
+            </a:r>
+          </a:p>
+          <a:p>
+            <a:r>
+              <a:t>Lưu ý: có procedure so sánh @Language = 'V' (chữ hoa), trong khi controller so 'v' (chữ thường) — nếu collation không phân biệt hoa thường thì kết quả như nhau, nhưng đừng mặc định là luôn như vậy.</a:t>
             </a:r>
           </a:p>
         </p:txBody>
@@ -874,22 +874,22 @@
           <a:lstStyle/>
           <a:p>
             <a:r>
-              <a:t>Các hàm / procedure hệ thống hay gặp nhất trong controller FBO mẫu: GetAuthorize (352 lần), ReadCurrency (347), CheckSQLInjection, Split, Voucher$Finding, Partition$Execute, UpdateIdentityNumber / UpdateLineNumber, GetUnitFilter, GetCheckKey, FormatStringValue.</a:t>
-            </a:r>
-          </a:p>
-          <a:p>
-            <a:r>
-              <a:t>Ý nghĩa ghi trên slide suy từ tên và cách gọi — trước khi dùng, F12 để xem code và tham số thật.</a:t>
-            </a:r>
-          </a:p>
-          <a:p>
-            <a:r>
-              <a:t>Tiền tố tên procedure quan sát được: rs_ cho báo cáo, phiếu in (nhiều nhất); fs_ xử lý / chuyển số liệu; bs_ tác vụ nền, thông báo; cs_ hợp nhất; hs_ nhân sự; z... là đối tượng tự thêm cho dự án. Đây là quy ước quan sát được, không phải quy định chính thức.</a:t>
-            </a:r>
-          </a:p>
-          <a:p>
-            <a:r>
-              <a:t>Tìm procedure: Lookup (Ctrl+Shift+L), Ctrl+P gõ #tên, cây SQL Object; trong source dùng File Reference hoặc Ctrl+Shift+F của BcodeViewer.</a:t>
+              <a:t>Các hàm và procedure hệ thống hay gặp nhất trong controller của FBO mẫu: GetAuthorize (352 lần), ReadCurrency (347 lần), CheckSQLInjection, Split, Voucher$Finding, Partition$Execute, UpdateIdentityNumber / UpdateLineNumber, GetUnitFilter, GetCheckKey, FormatStringValue.</a:t>
+            </a:r>
+          </a:p>
+          <a:p>
+            <a:r>
+              <a:t>Ý nghĩa ghi trên slide được suy ra từ tên và cách gọi — trước khi dùng, bấm F12 để xem code và tham số thật.</a:t>
+            </a:r>
+          </a:p>
+          <a:p>
+            <a:r>
+              <a:t>Tiền tố tên procedure quan sát được: rs_ cho báo cáo và phiếu in (nhiều nhất); fs_ cho xử lý, chuyển số liệu; bs_ cho tác vụ nền, thông báo; cs_ cho hợp nhất; hs_ cho nhân sự; z... là đối tượng tự thêm cho dự án. Đây là quy ước quan sát được, không phải quy định chính thức.</a:t>
+            </a:r>
+          </a:p>
+          <a:p>
+            <a:r>
+              <a:t>Cách tìm procedure: Lookup (Ctrl+Shift+L), Ctrl+P rồi gõ #tên, hoặc cây SQL Object; muốn tìm trong source thì dùng File Reference hoặc Ctrl+Shift+F của BcodeViewer.</a:t>
             </a:r>
           </a:p>
         </p:txBody>
@@ -964,42 +964,42 @@
           </a:p>
           <a:p>
             <a:r>
-              <a:t>NULL: cộng chuỗi / số với NULL ra NULL; NOT IN với danh sách có NULL ra rỗng. SET ANSI_NULLS OFF viết trong thân procedure không có tác dụng (lấy theo lúc CREATE / ALTER), nên luôn viết rõ IS NULL / ISNULL khi so sánh NULL.</a:t>
-            </a:r>
-          </a:p>
-          <a:p>
-            <a:r>
-              <a:t>Chia 0: dùng NULLIF.</a:t>
-            </a:r>
-          </a:p>
-          <a:p>
-            <a:r>
-              <a:t>Collation: JOIN bảng tạm với bảng thật báo xung đột collation vì tempdb khác collation — thêm COLLATE DATABASE_DEFAULT hoặc tạo bảng tạm bằng SELECT TOP 0 INTO từ bảng thật.</a:t>
-            </a:r>
-          </a:p>
-          <a:p>
-            <a:r>
-              <a:t>Ngày: dùng yyyymmdd; smalldatetime chỉ tới 2079.</a:t>
-            </a:r>
-          </a:p>
-          <a:p>
-            <a:r>
-              <a:t>SET NOCOUNT ON: thiếu nó màn hình / Excel có thể đọc sai bảng kết quả.</a:t>
-            </a:r>
-          </a:p>
-          <a:p>
-            <a:r>
-              <a:t>Transaction lồng: ROLLBACK ở procedure con huỷ cả transaction ngoài. Dùng TRY/CATCH, kiểm tra @@TRANCOUNT, SET XACT_ABORT ON.</a:t>
-            </a:r>
-          </a:p>
-          <a:p>
-            <a:r>
-              <a:t>Quyền: DROP rồi CREATE làm mất GRANT — dùng ALTER.</a:t>
-            </a:r>
-          </a:p>
-          <a:p>
-            <a:r>
-              <a:t>SQL động: nhân đôi dấu nháy hoặc dùng sp_executesql có tham số; Fast có hàm CheckSQLInjection.</a:t>
+              <a:t>NULL: cộng chuỗi hoặc số với NULL sẽ ra NULL; NOT IN với một danh sách có chứa NULL sẽ ra rỗng. SET ANSI_NULLS OFF viết trong thân procedure không có tác dụng (thiết lập này lấy theo lúc CREATE / ALTER procedure), nên luôn viết rõ IS NULL / ISNULL khi so sánh với NULL.</a:t>
+            </a:r>
+          </a:p>
+          <a:p>
+            <a:r>
+              <a:t>Chia cho 0: dùng NULLIF để biến mẫu số 0 thành NULL.</a:t>
+            </a:r>
+          </a:p>
+          <a:p>
+            <a:r>
+              <a:t>Collation: JOIN bảng tạm với bảng thật bị báo xung đột collation vì tempdb dùng collation khác — thêm COLLATE DATABASE_DEFAULT, hoặc tạo bảng tạm bằng SELECT TOP 0 ... INTO từ bảng thật.</a:t>
+            </a:r>
+          </a:p>
+          <a:p>
+            <a:r>
+              <a:t>Ngày: viết dạng yyyymmdd; kiểu smalldatetime chỉ chứa được tới năm 2079.</a:t>
+            </a:r>
+          </a:p>
+          <a:p>
+            <a:r>
+              <a:t>SET NOCOUNT ON: thiếu lệnh này thì màn hình hoặc file Excel có thể đọc nhầm bảng kết quả.</a:t>
+            </a:r>
+          </a:p>
+          <a:p>
+            <a:r>
+              <a:t>Transaction lồng nhau: ROLLBACK ở procedure con sẽ huỷ luôn cả transaction bên ngoài. Dùng TRY/CATCH, kiểm tra @@TRANCOUNT, và SET XACT_ABORT ON.</a:t>
+            </a:r>
+          </a:p>
+          <a:p>
+            <a:r>
+              <a:t>Quyền: DROP rồi CREATE làm mất các quyền đã GRANT — nên dùng ALTER.</a:t>
+            </a:r>
+          </a:p>
+          <a:p>
+            <a:r>
+              <a:t>SQL động: nhân đôi dấu nháy đơn, hoặc dùng sp_executesql có tham số; Fast có sẵn hàm CheckSQLInjection.</a:t>
             </a:r>
           </a:p>
         </p:txBody>
@@ -1074,7 +1074,7 @@
           </a:p>
           <a:p>
             <a:r>
-              <a:t>Bài tập về nhà: Viết script triển khai + script rollback cho procedure đã sửa, đưa vào Note (New).</a:t>
+              <a:t>Bài tập về nhà: Viết script triển khai và script rollback cho procedure đã sửa, rồi đưa vào Note (New).</a:t>
             </a:r>
           </a:p>
         </p:txBody>
@@ -1154,12 +1154,12 @@
           </a:p>
           <a:p>
             <a:r>
-              <a:t>2. Khi người dùng đổi mã khoá — lấy giá trị cũ để kiểm tra / cập nhật.</a:t>
-            </a:r>
-          </a:p>
-          <a:p>
-            <a:r>
-              <a:t>3. Không — macro do Fast thay trước khi chạy; phải thay bằng giá trị.</a:t>
+              <a:t>2. Khi người dùng đổi mã khoá: dùng để lấy giá trị cũ mà kiểm tra hoặc cập nhật.</a:t>
+            </a:r>
+          </a:p>
+          <a:p>
+            <a:r>
+              <a:t>3. Không. Fast thay macro trước khi chạy; ở SQL Query phải tự thay bằng giá trị.</a:t>
             </a:r>
           </a:p>
           <a:p>
@@ -4810,7 +4810,7 @@
                 <a:ea typeface="Segoe UI"/>
                 <a:cs typeface="Segoe UI"/>
               </a:rPr>
-              <a:t>Tránh lỗi NULL, chia 0, collation, ngày, transaction, quyền</a:t>
+              <a:t>Tránh các lỗi về NULL, chia cho 0, collation, ngày, transaction, quyền</a:t>
             </a:r>
           </a:p>
         </p:txBody>
@@ -6311,7 +6311,7 @@
                 <a:ea typeface="Segoe UI"/>
                 <a:cs typeface="Segoe UI"/>
               </a:rPr>
-              <a:t>DB thử</a:t>
+              <a:t>database thử</a:t>
             </a:r>
           </a:p>
         </p:txBody>
@@ -6842,7 +6842,7 @@
                 <a:ea typeface="Segoe UI"/>
                 <a:cs typeface="Segoe UI"/>
               </a:rPr>
-              <a:t>+ rollback</a:t>
+              <a:t>+ script rollback</a:t>
             </a:r>
           </a:p>
         </p:txBody>
@@ -7093,7 +7093,7 @@
                 <a:ea typeface="Segoe UI"/>
                 <a:cs typeface="Segoe UI"/>
               </a:rPr>
-              <a:t>, tránh DROP + CREATE (mất </a:t>
+              <a:t>, tránh DROP rồi CREATE (sẽ mất </a:t>
             </a:r>
             <a:r>
               <a:rPr sz="1700" b="1" i="0">
@@ -7217,7 +7217,7 @@
                 <a:ea typeface="Segoe UI"/>
                 <a:cs typeface="Segoe UI"/>
               </a:rPr>
-              <a:t>Procedure mã hoá (WITH ENCRYPTION) không xem / đóng gói được.</a:t>
+              <a:t>Procedure mã hoá (WITH ENCRYPTION) không xem và không đóng gói được.</a:t>
             </a:r>
           </a:p>
         </p:txBody>
@@ -7679,7 +7679,7 @@
                           <a:ea typeface="Segoe UI"/>
                           <a:cs typeface="Segoe UI"/>
                         </a:rPr>
-                        <a:t>User đang đăng nhập · có quyền admin</a:t>
+                        <a:t>User đang đăng nhập · user có quyền admin không</a:t>
                       </a:r>
                     </a:p>
                   </a:txBody>
@@ -8011,7 +8011,7 @@
                           <a:ea typeface="Segoe UI"/>
                           <a:cs typeface="Segoe UI"/>
                         </a:rPr>
-                        <a:t>Đơn vị · form · cờ đang thêm / sửa</a:t>
+                        <a:t>Đơn vị · form · cờ đang thêm hay sửa</a:t>
                       </a:r>
                     </a:p>
                   </a:txBody>
@@ -8223,7 +8223,7 @@
                           <a:ea typeface="Segoe UI"/>
                           <a:cs typeface="Segoe UI"/>
                         </a:rPr>
-                        <a:t>Biến tự khai · tên theo ngôn ngữ</a:t>
+                        <a:t>Biến tự khai báo · tên theo ngôn ngữ</a:t>
                       </a:r>
                     </a:p>
                   </a:txBody>
@@ -8429,7 +8429,7 @@
                 <a:ea typeface="Segoe UI"/>
                 <a:cs typeface="Segoe UI"/>
               </a:rPr>
-              <a:t> khi copy sang SQL Query — thay bằng giá trị (Viewer </a:t>
+              <a:t> khi copy sang SQL Query — phải thay bằng giá trị (Viewer </a:t>
             </a:r>
             <a:r>
               <a:rPr sz="1300" b="0" i="0">
@@ -9080,7 +9080,7 @@
                           <a:ea typeface="Segoe UI"/>
                           <a:cs typeface="Segoe UI"/>
                         </a:rPr>
-                        <a:t>Lọc đơn vị theo quyền · kiểm chuỗi </a:t>
+                        <a:t>Lọc đơn vị theo quyền · kiểm tra chuỗi </a:t>
                       </a:r>
                       <a:r>
                         <a:rPr sz="1300" b="0" i="0">
@@ -9301,7 +9301,7 @@
                           <a:ea typeface="Segoe UI"/>
                           <a:cs typeface="Segoe UI"/>
                         </a:rPr>
-                        <a:t>Báo cáo · xử lý · nền / thông báo · hợp nhất · nhân sự · tự thêm</a:t>
+                        <a:t>Báo cáo · xử lý · tác vụ nền, thông báo · hợp nhất · nhân sự · tự thêm</a:t>
                       </a:r>
                     </a:p>
                   </a:txBody>
@@ -9451,7 +9451,7 @@
                 <a:ea typeface="Segoe UI"/>
                 <a:cs typeface="Segoe UI"/>
               </a:rPr>
-              <a:t> Ý nghĩa suy từ tên / cách gọi trong source mẫu. Trước khi dùng: </a:t>
+              <a:t> Ý nghĩa được suy từ tên và cách gọi trong source mẫu. Trước khi dùng: </a:t>
             </a:r>
             <a:r>
               <a:rPr sz="1400" b="1" i="0">
@@ -10173,7 +10173,7 @@
                           <a:ea typeface="Segoe UI"/>
                           <a:cs typeface="Segoe UI"/>
                         </a:rPr>
-                        <a:t> ≤ 2079</a:t>
+                        <a:t> chỉ tới 2079</a:t>
                       </a:r>
                     </a:p>
                   </a:txBody>
@@ -10234,7 +10234,7 @@
                           <a:ea typeface="Segoe UI"/>
                           <a:cs typeface="Segoe UI"/>
                         </a:rPr>
-                        <a:t> đầu procedure — tránh lệch bảng kết quả</a:t>
+                        <a:t> ở đầu procedure — tránh đọc lệch bảng kết quả</a:t>
                       </a:r>
                     </a:p>
                   </a:txBody>
@@ -10400,7 +10400,7 @@
                           <a:ea typeface="Segoe UI"/>
                           <a:cs typeface="Segoe UI"/>
                         </a:rPr>
-                        <a:t>ALTER thay DROP/CREATE; tạo mới thì GRANT lại</a:t>
+                        <a:t>Dùng ALTER thay DROP/CREATE; tạo mới thì GRANT lại</a:t>
                       </a:r>
                     </a:p>
                   </a:txBody>
@@ -10781,7 +10781,7 @@
                 <a:ea typeface="Segoe UI"/>
                 <a:cs typeface="Segoe UI"/>
               </a:rPr>
-              <a:t> Sửa procedure báo cáo của buổi 6: thêm cột, test, So sánh object với bản cũ, khôi phục bằng Lịch sử sửa procedure.</a:t>
+              <a:t> Sửa procedure báo cáo của buổi 6: thêm cột, test, dùng So sánh object để so với bản cũ, rồi khôi phục bằng Lịch sử sửa procedure.</a:t>
             </a:r>
           </a:p>
           <a:p>
@@ -10821,7 +10821,7 @@
                 <a:ea typeface="Segoe UI"/>
                 <a:cs typeface="Segoe UI"/>
               </a:rPr>
-              <a:t> Cố tình gây lỗi chia 0 / collation / NULL trong bản sao và sửa.</a:t>
+              <a:t> Cố tình gây lỗi chia cho 0, lỗi collation, lỗi NULL trên bản sao database rồi sửa.</a:t>
             </a:r>
           </a:p>
         </p:txBody>
@@ -11167,7 +11167,7 @@
                 <a:ea typeface="Segoe UI"/>
                 <a:cs typeface="Segoe UI"/>
               </a:rPr>
-              <a:t> Viết script triển khai + script rollback cho procedure đã sửa, đưa vào Note (New).</a:t>
+              <a:t> Viết script triển khai và script rollback cho procedure đã sửa, rồi đưa vào Note (New).</a:t>
             </a:r>
           </a:p>
         </p:txBody>
@@ -11455,7 +11455,7 @@
                 <a:ea typeface="Segoe UI"/>
                 <a:cs typeface="Segoe UI"/>
               </a:rPr>
-              <a:t> Vì sao dùng ALTER thay DROP + CREATE?</a:t>
+              <a:t> Vì sao dùng ALTER thay vì DROP + CREATE?</a:t>
             </a:r>
           </a:p>
           <a:p>
@@ -11619,7 +11619,7 @@
                 <a:ea typeface="Segoe UI"/>
                 <a:cs typeface="Segoe UI"/>
               </a:rPr>
-              <a:t> Sửa lỗi collation khi JOIN #temp?</a:t>
+              <a:t> Sửa lỗi collation khi JOIN với #temp thế nào?</a:t>
             </a:r>
           </a:p>
         </p:txBody>
